--- a/data-eng/decks/w5d4s0.pptx
+++ b/data-eng/decks/w5d4s0.pptx
@@ -6468,7 +6468,7 @@
                 <a:ea typeface="Pretendard"/>
                 <a:cs typeface="Pretendard"/>
               </a:rPr>
-              <a:t>1 5-3 확인</a:t>
+              <a:t>1. 5-3 확인</a:t>
             </a:r>
           </a:p>
         </p:txBody>
@@ -6632,7 +6632,7 @@
                 <a:ea typeface="Pretendard"/>
                 <a:cs typeface="Pretendard"/>
               </a:rPr>
-              <a:t>2 4주차 멈춤</a:t>
+              <a:t>2. 4주차 멈춤</a:t>
             </a:r>
           </a:p>
         </p:txBody>
@@ -6796,7 +6796,7 @@
                 <a:ea typeface="Pretendard"/>
                 <a:cs typeface="Pretendard"/>
               </a:rPr>
-              <a:t>3 켜기</a:t>
+              <a:t>3. 켜기</a:t>
             </a:r>
           </a:p>
         </p:txBody>
@@ -6960,7 +6960,7 @@
                 <a:ea typeface="Pretendard"/>
                 <a:cs typeface="Pretendard"/>
               </a:rPr>
-              <a:t>4 오늘 만들 것</a:t>
+              <a:t>4. 오늘 만들 것</a:t>
             </a:r>
           </a:p>
         </p:txBody>
@@ -7124,7 +7124,7 @@
                 <a:ea typeface="Pretendard"/>
                 <a:cs typeface="Pretendard"/>
               </a:rPr>
-              <a:t>5 환경 재설정</a:t>
+              <a:t>5. 환경 재설정</a:t>
             </a:r>
           </a:p>
         </p:txBody>
